--- a/docs/ppt/laos-intro-ppt-master.pptx
+++ b/docs/ppt/laos-intro-ppt-master.pptx
@@ -748,6 +748,10 @@
             </a:solidFill>
           </a:ln>
         </p:spPr>
+        <p:txBody>
+          <a:bodyPr/>
+          <a:p/>
+        </p:txBody>
       </p:sp>
       <p:sp>
         <p:nvSpPr>
@@ -770,6 +774,10 @@
             <a:noFill/>
           </a:ln>
         </p:spPr>
+        <p:txBody>
+          <a:bodyPr/>
+          <a:p/>
+        </p:txBody>
       </p:sp>
       <p:sp>
         <p:nvSpPr>
@@ -846,7 +854,7 @@
                 <a:ea typeface="+mn-ea"/>
                 <a:cs typeface="+mn-cs"/>
               </a:rPr>
-              <a:t>给 AI Agent 一座操作系统</a:t>
+              <a:t>Linux 内核的 Agent 治理层</a:t>
             </a:r>
           </a:p>
         </p:txBody>
@@ -952,6 +960,10 @@
             <a:noFill/>
           </a:ln>
         </p:spPr>
+        <p:txBody>
+          <a:bodyPr/>
+          <a:p/>
+        </p:txBody>
       </p:sp>
       <p:sp>
         <p:nvSpPr>
@@ -1134,6 +1146,10 @@
             </a:solidFill>
           </a:ln>
         </p:spPr>
+        <p:txBody>
+          <a:bodyPr/>
+          <a:p/>
+        </p:txBody>
       </p:sp>
       <p:sp>
         <p:nvSpPr>
@@ -1156,6 +1172,10 @@
             </a:solidFill>
           </a:ln>
         </p:spPr>
+        <p:txBody>
+          <a:bodyPr/>
+          <a:p/>
+        </p:txBody>
       </p:sp>
       <p:sp>
         <p:nvSpPr>
@@ -1178,6 +1198,10 @@
             </a:solidFill>
           </a:ln>
         </p:spPr>
+        <p:txBody>
+          <a:bodyPr/>
+          <a:p/>
+        </p:txBody>
       </p:sp>
       <p:sp>
         <p:nvSpPr>
@@ -1200,6 +1224,10 @@
             <a:noFill/>
           </a:ln>
         </p:spPr>
+        <p:txBody>
+          <a:bodyPr/>
+          <a:p/>
+        </p:txBody>
       </p:sp>
       <p:sp>
         <p:nvSpPr>
@@ -1262,6 +1290,10 @@
             <a:noFill/>
           </a:ln>
         </p:spPr>
+        <p:txBody>
+          <a:bodyPr/>
+          <a:p/>
+        </p:txBody>
       </p:sp>
       <p:sp>
         <p:nvSpPr>
@@ -1284,6 +1316,10 @@
             <a:noFill/>
           </a:ln>
         </p:spPr>
+        <p:txBody>
+          <a:bodyPr/>
+          <a:p/>
+        </p:txBody>
       </p:sp>
       <p:sp>
         <p:nvSpPr>
@@ -1320,6 +1356,10 @@
             </a:solidFill>
           </a:ln>
         </p:spPr>
+        <p:txBody>
+          <a:bodyPr/>
+          <a:p/>
+        </p:txBody>
       </p:sp>
       <p:sp>
         <p:nvSpPr>
@@ -1552,6 +1592,10 @@
             </a:solidFill>
           </a:ln>
         </p:spPr>
+        <p:txBody>
+          <a:bodyPr/>
+          <a:p/>
+        </p:txBody>
       </p:sp>
       <p:sp>
         <p:nvSpPr>
@@ -1694,6 +1738,10 @@
             <a:noFill/>
           </a:ln>
         </p:spPr>
+        <p:txBody>
+          <a:bodyPr/>
+          <a:p/>
+        </p:txBody>
       </p:sp>
       <p:sp>
         <p:nvSpPr>
@@ -1796,6 +1844,10 @@
             <a:noFill/>
           </a:ln>
         </p:spPr>
+        <p:txBody>
+          <a:bodyPr/>
+          <a:p/>
+        </p:txBody>
       </p:sp>
       <p:sp>
         <p:nvSpPr>
@@ -1898,6 +1950,10 @@
             <a:noFill/>
           </a:ln>
         </p:spPr>
+        <p:txBody>
+          <a:bodyPr/>
+          <a:p/>
+        </p:txBody>
       </p:sp>
       <p:sp>
         <p:nvSpPr>
@@ -2000,6 +2056,10 @@
             <a:noFill/>
           </a:ln>
         </p:spPr>
+        <p:txBody>
+          <a:bodyPr/>
+          <a:p/>
+        </p:txBody>
       </p:sp>
       <p:sp>
         <p:nvSpPr>
@@ -2076,6 +2136,10 @@
             </a:solidFill>
           </a:ln>
         </p:spPr>
+        <p:txBody>
+          <a:bodyPr/>
+          <a:p/>
+        </p:txBody>
       </p:sp>
       <p:sp>
         <p:nvSpPr>
@@ -2192,6 +2256,10 @@
             </a:solidFill>
           </a:ln>
         </p:spPr>
+        <p:txBody>
+          <a:bodyPr/>
+          <a:p/>
+        </p:txBody>
       </p:sp>
       <p:sp>
         <p:nvSpPr>
@@ -2424,6 +2492,10 @@
             </a:solidFill>
           </a:ln>
         </p:spPr>
+        <p:txBody>
+          <a:bodyPr/>
+          <a:p/>
+        </p:txBody>
       </p:sp>
       <p:sp>
         <p:nvSpPr>
@@ -2540,6 +2612,10 @@
             </a:solidFill>
           </a:ln>
         </p:spPr>
+        <p:txBody>
+          <a:bodyPr/>
+          <a:p/>
+        </p:txBody>
       </p:sp>
       <p:sp>
         <p:nvSpPr>
@@ -2696,6 +2772,10 @@
             </a:solidFill>
           </a:ln>
         </p:spPr>
+        <p:txBody>
+          <a:bodyPr/>
+          <a:p/>
+        </p:txBody>
       </p:sp>
       <p:sp>
         <p:nvSpPr>
@@ -2852,6 +2932,10 @@
             </a:solidFill>
           </a:ln>
         </p:spPr>
+        <p:txBody>
+          <a:bodyPr/>
+          <a:p/>
+        </p:txBody>
       </p:sp>
       <p:sp>
         <p:nvSpPr>
@@ -3008,6 +3092,10 @@
             </a:solidFill>
           </a:ln>
         </p:spPr>
+        <p:txBody>
+          <a:bodyPr/>
+          <a:p/>
+        </p:txBody>
       </p:sp>
       <p:sp>
         <p:nvSpPr>
@@ -3164,6 +3252,10 @@
             </a:solidFill>
           </a:ln>
         </p:spPr>
+        <p:txBody>
+          <a:bodyPr/>
+          <a:p/>
+        </p:txBody>
       </p:sp>
       <p:sp>
         <p:nvSpPr>
@@ -3306,6 +3398,10 @@
             <a:noFill/>
           </a:ln>
         </p:spPr>
+        <p:txBody>
+          <a:bodyPr/>
+          <a:p/>
+        </p:txBody>
       </p:sp>
       <p:sp>
         <p:nvSpPr>
@@ -3422,6 +3518,10 @@
             </a:solidFill>
           </a:ln>
         </p:spPr>
+        <p:txBody>
+          <a:bodyPr/>
+          <a:p/>
+        </p:txBody>
       </p:sp>
       <p:sp>
         <p:nvSpPr>
@@ -3654,6 +3754,10 @@
             </a:solidFill>
           </a:ln>
         </p:spPr>
+        <p:txBody>
+          <a:bodyPr/>
+          <a:p/>
+        </p:txBody>
       </p:sp>
       <p:sp>
         <p:nvSpPr>
@@ -3810,6 +3914,10 @@
             </a:solidFill>
           </a:ln>
         </p:spPr>
+        <p:txBody>
+          <a:bodyPr/>
+          <a:p/>
+        </p:txBody>
       </p:sp>
       <p:sp>
         <p:nvSpPr>
@@ -4046,6 +4154,10 @@
             </a:solidFill>
           </a:ln>
         </p:spPr>
+        <p:txBody>
+          <a:bodyPr/>
+          <a:p/>
+        </p:txBody>
       </p:sp>
       <p:sp>
         <p:nvSpPr>
@@ -4278,6 +4390,10 @@
             </a:solidFill>
           </a:ln>
         </p:spPr>
+        <p:txBody>
+          <a:bodyPr/>
+          <a:p/>
+        </p:txBody>
       </p:sp>
       <p:sp>
         <p:nvSpPr>
@@ -4380,6 +4496,10 @@
             <a:noFill/>
           </a:ln>
         </p:spPr>
+        <p:txBody>
+          <a:bodyPr/>
+          <a:p/>
+        </p:txBody>
       </p:sp>
       <p:sp>
         <p:nvSpPr>
@@ -4522,6 +4642,10 @@
             <a:noFill/>
           </a:ln>
         </p:spPr>
+        <p:txBody>
+          <a:bodyPr/>
+          <a:p/>
+        </p:txBody>
       </p:sp>
       <p:sp>
         <p:nvSpPr>
@@ -4664,6 +4788,10 @@
             <a:noFill/>
           </a:ln>
         </p:spPr>
+        <p:txBody>
+          <a:bodyPr/>
+          <a:p/>
+        </p:txBody>
       </p:sp>
       <p:sp>
         <p:nvSpPr>
@@ -4860,6 +4988,10 @@
             </a:solidFill>
           </a:ln>
         </p:spPr>
+        <p:txBody>
+          <a:bodyPr/>
+          <a:p/>
+        </p:txBody>
       </p:sp>
       <p:sp>
         <p:nvSpPr>
@@ -5092,6 +5224,10 @@
             </a:solidFill>
           </a:ln>
         </p:spPr>
+        <p:txBody>
+          <a:bodyPr/>
+          <a:p/>
+        </p:txBody>
       </p:sp>
       <p:sp>
         <p:nvSpPr>
@@ -5248,6 +5384,10 @@
             </a:solidFill>
           </a:ln>
         </p:spPr>
+        <p:txBody>
+          <a:bodyPr/>
+          <a:p/>
+        </p:txBody>
       </p:sp>
       <p:sp>
         <p:nvSpPr>
@@ -5364,6 +5504,10 @@
             </a:solidFill>
           </a:ln>
         </p:spPr>
+        <p:txBody>
+          <a:bodyPr/>
+          <a:p/>
+        </p:txBody>
       </p:sp>
       <p:sp>
         <p:nvSpPr>
@@ -5480,6 +5624,10 @@
             </a:solidFill>
           </a:ln>
         </p:spPr>
+        <p:txBody>
+          <a:bodyPr/>
+          <a:p/>
+        </p:txBody>
       </p:sp>
       <p:sp>
         <p:nvSpPr>
@@ -5596,6 +5744,10 @@
             </a:solidFill>
           </a:ln>
         </p:spPr>
+        <p:txBody>
+          <a:bodyPr/>
+          <a:p/>
+        </p:txBody>
       </p:sp>
       <p:sp>
         <p:nvSpPr>
@@ -5698,6 +5850,10 @@
             <a:noFill/>
           </a:ln>
         </p:spPr>
+        <p:txBody>
+          <a:bodyPr/>
+          <a:p/>
+        </p:txBody>
       </p:sp>
       <p:sp>
         <p:nvSpPr>
@@ -5814,6 +5970,10 @@
             </a:solidFill>
           </a:ln>
         </p:spPr>
+        <p:txBody>
+          <a:bodyPr/>
+          <a:p/>
+        </p:txBody>
       </p:sp>
       <p:sp>
         <p:nvSpPr>
@@ -6046,6 +6206,10 @@
             </a:solidFill>
           </a:ln>
         </p:spPr>
+        <p:txBody>
+          <a:bodyPr/>
+          <a:p/>
+        </p:txBody>
       </p:sp>
       <p:sp>
         <p:nvSpPr>
@@ -6282,6 +6446,10 @@
             </a:solidFill>
           </a:ln>
         </p:spPr>
+        <p:txBody>
+          <a:bodyPr/>
+          <a:p/>
+        </p:txBody>
       </p:sp>
       <p:sp>
         <p:nvSpPr>
@@ -6438,6 +6606,10 @@
             </a:solidFill>
           </a:ln>
         </p:spPr>
+        <p:txBody>
+          <a:bodyPr/>
+          <a:p/>
+        </p:txBody>
       </p:sp>
       <p:sp>
         <p:nvSpPr>
@@ -6594,6 +6766,10 @@
             </a:solidFill>
           </a:ln>
         </p:spPr>
+        <p:txBody>
+          <a:bodyPr/>
+          <a:p/>
+        </p:txBody>
       </p:sp>
       <p:sp>
         <p:nvSpPr>
@@ -6750,6 +6926,10 @@
             </a:solidFill>
           </a:ln>
         </p:spPr>
+        <p:txBody>
+          <a:bodyPr/>
+          <a:p/>
+        </p:txBody>
       </p:sp>
       <p:sp>
         <p:nvSpPr>
@@ -6906,6 +7086,10 @@
             </a:solidFill>
           </a:ln>
         </p:spPr>
+        <p:txBody>
+          <a:bodyPr/>
+          <a:p/>
+        </p:txBody>
       </p:sp>
       <p:sp>
         <p:nvSpPr>
@@ -7062,6 +7246,10 @@
             </a:solidFill>
           </a:ln>
         </p:spPr>
+        <p:txBody>
+          <a:bodyPr/>
+          <a:p/>
+        </p:txBody>
       </p:sp>
       <p:sp>
         <p:nvSpPr>
@@ -7294,6 +7482,10 @@
             </a:solidFill>
           </a:ln>
         </p:spPr>
+        <p:txBody>
+          <a:bodyPr/>
+          <a:p/>
+        </p:txBody>
       </p:sp>
       <p:sp>
         <p:nvSpPr>
@@ -7396,6 +7588,10 @@
             <a:noFill/>
           </a:ln>
         </p:spPr>
+        <p:txBody>
+          <a:bodyPr/>
+          <a:p/>
+        </p:txBody>
       </p:sp>
       <p:sp>
         <p:nvSpPr>
@@ -7498,6 +7694,10 @@
             <a:noFill/>
           </a:ln>
         </p:spPr>
+        <p:txBody>
+          <a:bodyPr/>
+          <a:p/>
+        </p:txBody>
       </p:sp>
       <p:sp>
         <p:nvSpPr>
@@ -7600,6 +7800,10 @@
             <a:noFill/>
           </a:ln>
         </p:spPr>
+        <p:txBody>
+          <a:bodyPr/>
+          <a:p/>
+        </p:txBody>
       </p:sp>
       <p:sp>
         <p:nvSpPr>
@@ -7702,6 +7906,10 @@
             <a:noFill/>
           </a:ln>
         </p:spPr>
+        <p:txBody>
+          <a:bodyPr/>
+          <a:p/>
+        </p:txBody>
       </p:sp>
       <p:sp>
         <p:nvSpPr>
@@ -7804,6 +8012,10 @@
             <a:noFill/>
           </a:ln>
         </p:spPr>
+        <p:txBody>
+          <a:bodyPr/>
+          <a:p/>
+        </p:txBody>
       </p:sp>
       <p:sp>
         <p:nvSpPr>
@@ -7906,6 +8118,10 @@
             <a:noFill/>
           </a:ln>
         </p:spPr>
+        <p:txBody>
+          <a:bodyPr/>
+          <a:p/>
+        </p:txBody>
       </p:sp>
       <p:sp>
         <p:nvSpPr>
@@ -8008,6 +8224,10 @@
             <a:noFill/>
           </a:ln>
         </p:spPr>
+        <p:txBody>
+          <a:bodyPr/>
+          <a:p/>
+        </p:txBody>
       </p:sp>
       <p:sp>
         <p:nvSpPr>
@@ -8110,6 +8330,10 @@
             <a:noFill/>
           </a:ln>
         </p:spPr>
+        <p:txBody>
+          <a:bodyPr/>
+          <a:p/>
+        </p:txBody>
       </p:sp>
       <p:sp>
         <p:nvSpPr>
@@ -8172,6 +8396,10 @@
             <a:noFill/>
           </a:ln>
         </p:spPr>
+        <p:txBody>
+          <a:bodyPr/>
+          <a:p/>
+        </p:txBody>
       </p:sp>
       <p:sp>
         <p:nvSpPr>
@@ -8234,6 +8462,10 @@
             <a:noFill/>
           </a:ln>
         </p:spPr>
+        <p:txBody>
+          <a:bodyPr/>
+          <a:p/>
+        </p:txBody>
       </p:sp>
       <p:sp>
         <p:nvSpPr>
@@ -8296,6 +8528,10 @@
             <a:noFill/>
           </a:ln>
         </p:spPr>
+        <p:txBody>
+          <a:bodyPr/>
+          <a:p/>
+        </p:txBody>
       </p:sp>
       <p:sp>
         <p:nvSpPr>
@@ -8358,6 +8594,10 @@
             <a:noFill/>
           </a:ln>
         </p:spPr>
+        <p:txBody>
+          <a:bodyPr/>
+          <a:p/>
+        </p:txBody>
       </p:sp>
       <p:sp>
         <p:nvSpPr>
@@ -8420,6 +8660,10 @@
             <a:noFill/>
           </a:ln>
         </p:spPr>
+        <p:txBody>
+          <a:bodyPr/>
+          <a:p/>
+        </p:txBody>
       </p:sp>
       <p:sp>
         <p:nvSpPr>
@@ -8482,6 +8726,10 @@
             <a:noFill/>
           </a:ln>
         </p:spPr>
+        <p:txBody>
+          <a:bodyPr/>
+          <a:p/>
+        </p:txBody>
       </p:sp>
       <p:sp>
         <p:nvSpPr>
@@ -8598,6 +8846,10 @@
             </a:solidFill>
           </a:ln>
         </p:spPr>
+        <p:txBody>
+          <a:bodyPr/>
+          <a:p/>
+        </p:txBody>
       </p:sp>
       <p:sp>
         <p:nvSpPr>
@@ -8830,6 +9082,10 @@
             </a:solidFill>
           </a:ln>
         </p:spPr>
+        <p:txBody>
+          <a:bodyPr/>
+          <a:p/>
+        </p:txBody>
       </p:sp>
       <p:sp>
         <p:nvSpPr>
@@ -8934,6 +9190,10 @@
             </a:solidFill>
           </a:ln>
         </p:spPr>
+        <p:txBody>
+          <a:bodyPr/>
+          <a:p/>
+        </p:txBody>
       </p:sp>
       <p:sp>
         <p:nvSpPr>
@@ -8956,6 +9216,10 @@
             <a:noFill/>
           </a:ln>
         </p:spPr>
+        <p:txBody>
+          <a:bodyPr/>
+          <a:p/>
+        </p:txBody>
       </p:sp>
       <p:sp>
         <p:nvSpPr>
@@ -9100,6 +9364,10 @@
             </a:solidFill>
           </a:ln>
         </p:spPr>
+        <p:txBody>
+          <a:bodyPr/>
+          <a:p/>
+        </p:txBody>
       </p:sp>
       <p:sp>
         <p:nvSpPr>
@@ -9122,6 +9390,10 @@
             <a:noFill/>
           </a:ln>
         </p:spPr>
+        <p:txBody>
+          <a:bodyPr/>
+          <a:p/>
+        </p:txBody>
       </p:sp>
       <p:sp>
         <p:nvSpPr>
@@ -9266,6 +9538,10 @@
             </a:solidFill>
           </a:ln>
         </p:spPr>
+        <p:txBody>
+          <a:bodyPr/>
+          <a:p/>
+        </p:txBody>
       </p:sp>
       <p:sp>
         <p:nvSpPr>
@@ -9288,6 +9564,10 @@
             <a:noFill/>
           </a:ln>
         </p:spPr>
+        <p:txBody>
+          <a:bodyPr/>
+          <a:p/>
+        </p:txBody>
       </p:sp>
       <p:sp>
         <p:nvSpPr>
@@ -9484,6 +9764,10 @@
             </a:solidFill>
           </a:ln>
         </p:spPr>
+        <p:txBody>
+          <a:bodyPr/>
+          <a:p/>
+        </p:txBody>
       </p:sp>
       <p:sp>
         <p:nvSpPr>
@@ -9716,6 +10000,10 @@
             </a:solidFill>
           </a:ln>
         </p:spPr>
+        <p:txBody>
+          <a:bodyPr/>
+          <a:p/>
+        </p:txBody>
       </p:sp>
       <p:sp>
         <p:nvSpPr>
@@ -9818,6 +10106,10 @@
             <a:noFill/>
           </a:ln>
         </p:spPr>
+        <p:txBody>
+          <a:bodyPr/>
+          <a:p/>
+        </p:txBody>
       </p:sp>
       <p:sp>
         <p:nvSpPr>
@@ -9880,6 +10172,10 @@
             <a:noFill/>
           </a:ln>
         </p:spPr>
+        <p:txBody>
+          <a:bodyPr/>
+          <a:p/>
+        </p:txBody>
       </p:sp>
       <p:sp>
         <p:nvSpPr>
@@ -9942,6 +10238,10 @@
             <a:noFill/>
           </a:ln>
         </p:spPr>
+        <p:txBody>
+          <a:bodyPr/>
+          <a:p/>
+        </p:txBody>
       </p:sp>
       <p:sp>
         <p:nvSpPr>
@@ -10004,6 +10304,10 @@
             <a:noFill/>
           </a:ln>
         </p:spPr>
+        <p:txBody>
+          <a:bodyPr/>
+          <a:p/>
+        </p:txBody>
       </p:sp>
       <p:sp>
         <p:nvSpPr>
@@ -10066,6 +10370,10 @@
             <a:noFill/>
           </a:ln>
         </p:spPr>
+        <p:txBody>
+          <a:bodyPr/>
+          <a:p/>
+        </p:txBody>
       </p:sp>
       <p:sp>
         <p:nvSpPr>
@@ -10128,6 +10436,10 @@
             <a:noFill/>
           </a:ln>
         </p:spPr>
+        <p:txBody>
+          <a:bodyPr/>
+          <a:p/>
+        </p:txBody>
       </p:sp>
       <p:sp>
         <p:nvSpPr>
@@ -10190,6 +10502,10 @@
             <a:noFill/>
           </a:ln>
         </p:spPr>
+        <p:txBody>
+          <a:bodyPr/>
+          <a:p/>
+        </p:txBody>
       </p:sp>
       <p:sp>
         <p:nvSpPr>
@@ -10252,6 +10568,10 @@
             <a:noFill/>
           </a:ln>
         </p:spPr>
+        <p:txBody>
+          <a:bodyPr/>
+          <a:p/>
+        </p:txBody>
       </p:sp>
       <p:sp>
         <p:nvSpPr>
@@ -10314,6 +10634,10 @@
             <a:noFill/>
           </a:ln>
         </p:spPr>
+        <p:txBody>
+          <a:bodyPr/>
+          <a:p/>
+        </p:txBody>
       </p:sp>
       <p:sp>
         <p:nvSpPr>
@@ -10376,6 +10700,10 @@
             <a:noFill/>
           </a:ln>
         </p:spPr>
+        <p:txBody>
+          <a:bodyPr/>
+          <a:p/>
+        </p:txBody>
       </p:sp>
       <p:sp>
         <p:nvSpPr>
@@ -10438,6 +10766,10 @@
             <a:noFill/>
           </a:ln>
         </p:spPr>
+        <p:txBody>
+          <a:bodyPr/>
+          <a:p/>
+        </p:txBody>
       </p:sp>
       <p:sp>
         <p:nvSpPr>
@@ -10500,6 +10832,10 @@
             <a:noFill/>
           </a:ln>
         </p:spPr>
+        <p:txBody>
+          <a:bodyPr/>
+          <a:p/>
+        </p:txBody>
       </p:sp>
       <p:sp>
         <p:nvSpPr>
@@ -10576,6 +10912,10 @@
             </a:solidFill>
           </a:ln>
         </p:spPr>
+        <p:txBody>
+          <a:bodyPr/>
+          <a:p/>
+        </p:txBody>
       </p:sp>
       <p:sp>
         <p:nvSpPr>
@@ -10808,6 +11148,10 @@
             </a:solidFill>
           </a:ln>
         </p:spPr>
+        <p:txBody>
+          <a:bodyPr/>
+          <a:p/>
+        </p:txBody>
       </p:sp>
       <p:sp>
         <p:nvSpPr>
@@ -10924,6 +11268,10 @@
             </a:solidFill>
           </a:ln>
         </p:spPr>
+        <p:txBody>
+          <a:bodyPr/>
+          <a:p/>
+        </p:txBody>
       </p:sp>
       <p:sp>
         <p:nvSpPr>
@@ -11120,6 +11468,10 @@
             </a:solidFill>
           </a:ln>
         </p:spPr>
+        <p:txBody>
+          <a:bodyPr/>
+          <a:p/>
+        </p:txBody>
       </p:sp>
       <p:sp>
         <p:nvSpPr>
@@ -11316,6 +11668,10 @@
             </a:solidFill>
           </a:ln>
         </p:spPr>
+        <p:txBody>
+          <a:bodyPr/>
+          <a:p/>
+        </p:txBody>
       </p:sp>
       <p:sp>
         <p:nvSpPr>
@@ -11512,6 +11868,10 @@
             </a:solidFill>
           </a:ln>
         </p:spPr>
+        <p:txBody>
+          <a:bodyPr/>
+          <a:p/>
+        </p:txBody>
       </p:sp>
       <p:sp>
         <p:nvSpPr>
@@ -11694,6 +12054,10 @@
             <a:noFill/>
           </a:ln>
         </p:spPr>
+        <p:txBody>
+          <a:bodyPr/>
+          <a:p/>
+        </p:txBody>
       </p:sp>
       <p:sp>
         <p:nvSpPr>
@@ -11770,6 +12134,10 @@
             </a:solidFill>
           </a:ln>
         </p:spPr>
+        <p:txBody>
+          <a:bodyPr/>
+          <a:p/>
+        </p:txBody>
       </p:sp>
       <p:sp>
         <p:nvSpPr>
@@ -12002,6 +12370,10 @@
             </a:solidFill>
           </a:ln>
         </p:spPr>
+        <p:txBody>
+          <a:bodyPr/>
+          <a:p/>
+        </p:txBody>
       </p:sp>
       <p:sp>
         <p:nvSpPr>
@@ -12104,6 +12476,10 @@
             <a:noFill/>
           </a:ln>
         </p:spPr>
+        <p:txBody>
+          <a:bodyPr/>
+          <a:p/>
+        </p:txBody>
       </p:sp>
       <p:sp>
         <p:nvSpPr>
@@ -12246,6 +12622,10 @@
             <a:noFill/>
           </a:ln>
         </p:spPr>
+        <p:txBody>
+          <a:bodyPr/>
+          <a:p/>
+        </p:txBody>
       </p:sp>
       <p:sp>
         <p:nvSpPr>
@@ -12388,6 +12768,10 @@
             <a:noFill/>
           </a:ln>
         </p:spPr>
+        <p:txBody>
+          <a:bodyPr/>
+          <a:p/>
+        </p:txBody>
       </p:sp>
       <p:sp>
         <p:nvSpPr>
@@ -12624,6 +13008,10 @@
             </a:solidFill>
           </a:ln>
         </p:spPr>
+        <p:txBody>
+          <a:bodyPr/>
+          <a:p/>
+        </p:txBody>
       </p:sp>
       <p:sp>
         <p:nvSpPr>
